--- a/lectures/lecture30_31/fibonacci.pptx
+++ b/lectures/lecture30_31/fibonacci.pptx
@@ -113,15 +113,72 @@
       </a:defRPr>
     </a:lvl9pPr>
   </p:defaultTextStyle>
+  <p:extLst>
+    <p:ext uri="{EFAFB233-063F-42B5-8137-9DF3F51BA10A}">
+      <p15:sldGuideLst xmlns:p15="http://schemas.microsoft.com/office/powerpoint/2012/main"/>
+    </p:ext>
+  </p:extLst>
 </p:presentation>
 </file>
 
 <file path=ppt/revisionInfo.xml><?xml version="1.0" encoding="utf-8"?>
 <p1510:revInfo xmlns:a="http://schemas.openxmlformats.org/drawingml/2006/main" xmlns:r="http://schemas.openxmlformats.org/officeDocument/2006/relationships" xmlns:p1510="http://schemas.microsoft.com/office/powerpoint/2015/10/main">
   <p1510:revLst>
-    <p1510:client id="{79F5066A-D50F-BE44-ADBB-8542143105DD}" v="621" dt="2026-07-21T03:39:54.246"/>
+    <p1510:client id="{79F5066A-D50F-BE44-ADBB-8542143105DD}" v="687" dt="2026-07-28T01:33:06.770"/>
   </p1510:revLst>
 </p1510:revInfo>
+</file>
+
+<file path=ppt/changesInfos/changesInfo1.xml><?xml version="1.0" encoding="utf-8"?>
+<pc:chgInfo xmlns:a="http://schemas.openxmlformats.org/drawingml/2006/main" xmlns:r="http://schemas.openxmlformats.org/officeDocument/2006/relationships" xmlns:ac="http://schemas.microsoft.com/office/drawing/2013/main/command" xmlns:pc="http://schemas.microsoft.com/office/powerpoint/2013/main/command">
+  <pc:docChgLst>
+    <pc:chgData name="Toby Donaldson" userId="2e6e5431-bb17-4c41-9985-d39c50d83c73" providerId="ADAL" clId="{7F9681A8-EEE2-56F4-9B39-ECCBEE0471AC}"/>
+    <pc:docChg chg="undo custSel modSld">
+      <pc:chgData name="Toby Donaldson" userId="2e6e5431-bb17-4c41-9985-d39c50d83c73" providerId="ADAL" clId="{7F9681A8-EEE2-56F4-9B39-ECCBEE0471AC}" dt="2026-07-28T01:33:24.619" v="76" actId="20577"/>
+      <pc:docMkLst>
+        <pc:docMk/>
+      </pc:docMkLst>
+      <pc:sldChg chg="modSp mod">
+        <pc:chgData name="Toby Donaldson" userId="2e6e5431-bb17-4c41-9985-d39c50d83c73" providerId="ADAL" clId="{7F9681A8-EEE2-56F4-9B39-ECCBEE0471AC}" dt="2026-07-28T01:33:06.770" v="66" actId="113"/>
+        <pc:sldMkLst>
+          <pc:docMk/>
+          <pc:sldMk cId="746880468" sldId="263"/>
+        </pc:sldMkLst>
+        <pc:spChg chg="mod">
+          <ac:chgData name="Toby Donaldson" userId="2e6e5431-bb17-4c41-9985-d39c50d83c73" providerId="ADAL" clId="{7F9681A8-EEE2-56F4-9B39-ECCBEE0471AC}" dt="2026-07-28T01:33:06.770" v="66" actId="113"/>
+          <ac:spMkLst>
+            <pc:docMk/>
+            <pc:sldMk cId="746880468" sldId="263"/>
+            <ac:spMk id="5" creationId="{68D69E4E-8222-A49E-D966-A7B889200136}"/>
+          </ac:spMkLst>
+        </pc:spChg>
+        <pc:picChg chg="mod">
+          <ac:chgData name="Toby Donaldson" userId="2e6e5431-bb17-4c41-9985-d39c50d83c73" providerId="ADAL" clId="{7F9681A8-EEE2-56F4-9B39-ECCBEE0471AC}" dt="2026-07-28T01:31:08.405" v="1" actId="1076"/>
+          <ac:picMkLst>
+            <pc:docMk/>
+            <pc:sldMk cId="746880468" sldId="263"/>
+            <ac:picMk id="8" creationId="{C7B7406A-0A72-A708-99A6-3ED4B5547662}"/>
+          </ac:picMkLst>
+        </pc:picChg>
+      </pc:sldChg>
+      <pc:sldChg chg="modSp mod">
+        <pc:chgData name="Toby Donaldson" userId="2e6e5431-bb17-4c41-9985-d39c50d83c73" providerId="ADAL" clId="{7F9681A8-EEE2-56F4-9B39-ECCBEE0471AC}" dt="2026-07-28T01:33:24.619" v="76" actId="20577"/>
+        <pc:sldMkLst>
+          <pc:docMk/>
+          <pc:sldMk cId="1635948927" sldId="264"/>
+        </pc:sldMkLst>
+        <pc:spChg chg="mod">
+          <ac:chgData name="Toby Donaldson" userId="2e6e5431-bb17-4c41-9985-d39c50d83c73" providerId="ADAL" clId="{7F9681A8-EEE2-56F4-9B39-ECCBEE0471AC}" dt="2026-07-28T01:33:24.619" v="76" actId="20577"/>
+          <ac:spMkLst>
+            <pc:docMk/>
+            <pc:sldMk cId="1635948927" sldId="264"/>
+            <ac:spMk id="5" creationId="{4200D472-92EC-1E5B-59B2-277F8302AD89}"/>
+          </ac:spMkLst>
+        </pc:spChg>
+      </pc:sldChg>
+    </pc:docChg>
+  </pc:docChgLst>
+</pc:chgInfo>
 </file>
 
 <file path=ppt/slideLayouts/slideLayout1.xml><?xml version="1.0" encoding="utf-8"?>
@@ -271,7 +328,7 @@
           <a:p>
             <a:fld id="{AAF721F6-712F-E943-B5C8-C03A6A3C658B}" type="datetimeFigureOut">
               <a:rPr lang="en-US" smtClean="0"/>
-              <a:t>7/20/26</a:t>
+              <a:t>7/27/26</a:t>
             </a:fld>
             <a:endParaRPr lang="en-US"/>
           </a:p>
@@ -469,7 +526,7 @@
           <a:p>
             <a:fld id="{AAF721F6-712F-E943-B5C8-C03A6A3C658B}" type="datetimeFigureOut">
               <a:rPr lang="en-US" smtClean="0"/>
-              <a:t>7/20/26</a:t>
+              <a:t>7/27/26</a:t>
             </a:fld>
             <a:endParaRPr lang="en-US"/>
           </a:p>
@@ -677,7 +734,7 @@
           <a:p>
             <a:fld id="{AAF721F6-712F-E943-B5C8-C03A6A3C658B}" type="datetimeFigureOut">
               <a:rPr lang="en-US" smtClean="0"/>
-              <a:t>7/20/26</a:t>
+              <a:t>7/27/26</a:t>
             </a:fld>
             <a:endParaRPr lang="en-US"/>
           </a:p>
@@ -875,7 +932,7 @@
           <a:p>
             <a:fld id="{AAF721F6-712F-E943-B5C8-C03A6A3C658B}" type="datetimeFigureOut">
               <a:rPr lang="en-US" smtClean="0"/>
-              <a:t>7/20/26</a:t>
+              <a:t>7/27/26</a:t>
             </a:fld>
             <a:endParaRPr lang="en-US"/>
           </a:p>
@@ -1150,7 +1207,7 @@
           <a:p>
             <a:fld id="{AAF721F6-712F-E943-B5C8-C03A6A3C658B}" type="datetimeFigureOut">
               <a:rPr lang="en-US" smtClean="0"/>
-              <a:t>7/20/26</a:t>
+              <a:t>7/27/26</a:t>
             </a:fld>
             <a:endParaRPr lang="en-US"/>
           </a:p>
@@ -1415,7 +1472,7 @@
           <a:p>
             <a:fld id="{AAF721F6-712F-E943-B5C8-C03A6A3C658B}" type="datetimeFigureOut">
               <a:rPr lang="en-US" smtClean="0"/>
-              <a:t>7/20/26</a:t>
+              <a:t>7/27/26</a:t>
             </a:fld>
             <a:endParaRPr lang="en-US"/>
           </a:p>
@@ -1827,7 +1884,7 @@
           <a:p>
             <a:fld id="{AAF721F6-712F-E943-B5C8-C03A6A3C658B}" type="datetimeFigureOut">
               <a:rPr lang="en-US" smtClean="0"/>
-              <a:t>7/20/26</a:t>
+              <a:t>7/27/26</a:t>
             </a:fld>
             <a:endParaRPr lang="en-US"/>
           </a:p>
@@ -1968,7 +2025,7 @@
           <a:p>
             <a:fld id="{AAF721F6-712F-E943-B5C8-C03A6A3C658B}" type="datetimeFigureOut">
               <a:rPr lang="en-US" smtClean="0"/>
-              <a:t>7/20/26</a:t>
+              <a:t>7/27/26</a:t>
             </a:fld>
             <a:endParaRPr lang="en-US"/>
           </a:p>
@@ -2081,7 +2138,7 @@
           <a:p>
             <a:fld id="{AAF721F6-712F-E943-B5C8-C03A6A3C658B}" type="datetimeFigureOut">
               <a:rPr lang="en-US" smtClean="0"/>
-              <a:t>7/20/26</a:t>
+              <a:t>7/27/26</a:t>
             </a:fld>
             <a:endParaRPr lang="en-US"/>
           </a:p>
@@ -2392,7 +2449,7 @@
           <a:p>
             <a:fld id="{AAF721F6-712F-E943-B5C8-C03A6A3C658B}" type="datetimeFigureOut">
               <a:rPr lang="en-US" smtClean="0"/>
-              <a:t>7/20/26</a:t>
+              <a:t>7/27/26</a:t>
             </a:fld>
             <a:endParaRPr lang="en-US"/>
           </a:p>
@@ -2680,7 +2737,7 @@
           <a:p>
             <a:fld id="{AAF721F6-712F-E943-B5C8-C03A6A3C658B}" type="datetimeFigureOut">
               <a:rPr lang="en-US" smtClean="0"/>
-              <a:t>7/20/26</a:t>
+              <a:t>7/27/26</a:t>
             </a:fld>
             <a:endParaRPr lang="en-US"/>
           </a:p>
@@ -2921,7 +2978,7 @@
           <a:p>
             <a:fld id="{AAF721F6-712F-E943-B5C8-C03A6A3C658B}" type="datetimeFigureOut">
               <a:rPr lang="en-US" smtClean="0"/>
-              <a:t>7/20/26</a:t>
+              <a:t>7/27/26</a:t>
             </a:fld>
             <a:endParaRPr lang="en-US"/>
           </a:p>
@@ -4330,8 +4387,8 @@
           </a:p>
         </p:txBody>
       </p:sp>
-      <mc:AlternateContent xmlns:mc="http://schemas.openxmlformats.org/markup-compatibility/2006">
-        <mc:Choice xmlns:a14="http://schemas.microsoft.com/office/drawing/2010/main" Requires="a14">
+      <mc:AlternateContent xmlns:mc="http://schemas.openxmlformats.org/markup-compatibility/2006" xmlns:a14="http://schemas.microsoft.com/office/drawing/2010/main">
+        <mc:Choice Requires="a14">
           <p:sp>
             <p:nvSpPr>
               <p:cNvPr id="12" name="TextBox 11">
@@ -4586,7 +4643,7 @@
             </p:txBody>
           </p:sp>
         </mc:Choice>
-        <mc:Fallback>
+        <mc:Fallback xmlns="">
           <p:sp>
             <p:nvSpPr>
               <p:cNvPr id="12" name="TextBox 11">
@@ -4944,8 +5001,8 @@
           </a:p>
         </p:txBody>
       </p:sp>
-      <mc:AlternateContent xmlns:mc="http://schemas.openxmlformats.org/markup-compatibility/2006">
-        <mc:Choice xmlns:a14="http://schemas.microsoft.com/office/drawing/2010/main" Requires="a14">
+      <mc:AlternateContent xmlns:mc="http://schemas.openxmlformats.org/markup-compatibility/2006" xmlns:a14="http://schemas.microsoft.com/office/drawing/2010/main">
+        <mc:Choice Requires="a14">
           <p:sp>
             <p:nvSpPr>
               <p:cNvPr id="12" name="TextBox 11">
@@ -5200,7 +5257,7 @@
             </p:txBody>
           </p:sp>
         </mc:Choice>
-        <mc:Fallback>
+        <mc:Fallback xmlns="">
           <p:sp>
             <p:nvSpPr>
               <p:cNvPr id="12" name="TextBox 11">
@@ -5245,8 +5302,8 @@
           </p:sp>
         </mc:Fallback>
       </mc:AlternateContent>
-      <mc:AlternateContent xmlns:mc="http://schemas.openxmlformats.org/markup-compatibility/2006">
-        <mc:Choice xmlns:a14="http://schemas.microsoft.com/office/drawing/2010/main" Requires="a14">
+      <mc:AlternateContent xmlns:mc="http://schemas.openxmlformats.org/markup-compatibility/2006" xmlns:a14="http://schemas.microsoft.com/office/drawing/2010/main">
+        <mc:Choice Requires="a14">
           <p:sp>
             <p:nvSpPr>
               <p:cNvPr id="5" name="TextBox 4">
@@ -5436,7 +5493,7 @@
             </p:txBody>
           </p:sp>
         </mc:Choice>
-        <mc:Fallback>
+        <mc:Fallback xmlns="">
           <p:sp>
             <p:nvSpPr>
               <p:cNvPr id="5" name="TextBox 4">
@@ -5799,8 +5856,8 @@
           </a:p>
         </p:txBody>
       </p:sp>
-      <mc:AlternateContent xmlns:mc="http://schemas.openxmlformats.org/markup-compatibility/2006">
-        <mc:Choice xmlns:a14="http://schemas.microsoft.com/office/drawing/2010/main" Requires="a14">
+      <mc:AlternateContent xmlns:mc="http://schemas.openxmlformats.org/markup-compatibility/2006" xmlns:a14="http://schemas.microsoft.com/office/drawing/2010/main">
+        <mc:Choice Requires="a14">
           <p:sp>
             <p:nvSpPr>
               <p:cNvPr id="12" name="TextBox 11">
@@ -6055,7 +6112,7 @@
             </p:txBody>
           </p:sp>
         </mc:Choice>
-        <mc:Fallback>
+        <mc:Fallback xmlns="">
           <p:sp>
             <p:nvSpPr>
               <p:cNvPr id="12" name="TextBox 11">
@@ -6100,8 +6157,8 @@
           </p:sp>
         </mc:Fallback>
       </mc:AlternateContent>
-      <mc:AlternateContent xmlns:mc="http://schemas.openxmlformats.org/markup-compatibility/2006">
-        <mc:Choice xmlns:a14="http://schemas.microsoft.com/office/drawing/2010/main" Requires="a14">
+      <mc:AlternateContent xmlns:mc="http://schemas.openxmlformats.org/markup-compatibility/2006" xmlns:a14="http://schemas.microsoft.com/office/drawing/2010/main">
+        <mc:Choice Requires="a14">
           <p:sp>
             <p:nvSpPr>
               <p:cNvPr id="5" name="TextBox 4">
@@ -6256,7 +6313,6 @@
                 <a:endParaRPr lang="en-US" dirty="0"/>
               </a:p>
               <a:p>
-                <a:pPr/>
                 <a:r>
                   <a:rPr lang="en-CA" dirty="0"/>
                   <a:t>      </a:t>
@@ -6342,7 +6398,6 @@
                 <a:endParaRPr lang="en-CA" dirty="0"/>
               </a:p>
               <a:p>
-                <a:pPr/>
                 <a:r>
                   <a:rPr lang="en-CA" dirty="0"/>
                   <a:t>      </a:t>
@@ -6397,11 +6452,9 @@
                 <a:endParaRPr lang="en-US" dirty="0"/>
               </a:p>
               <a:p>
-                <a:pPr/>
                 <a:endParaRPr lang="en-US" dirty="0"/>
               </a:p>
               <a:p>
-                <a:pPr/>
                 <a:r>
                   <a:rPr lang="en-US" dirty="0"/>
                   <a:t>Therefore </a:t>
@@ -6557,11 +6610,9 @@
                 </a:r>
               </a:p>
               <a:p>
-                <a:pPr/>
                 <a:endParaRPr lang="en-US" dirty="0"/>
               </a:p>
               <a:p>
-                <a:pPr/>
                 <a:r>
                   <a:rPr lang="en-US" dirty="0"/>
                   <a:t>This shows that </a:t>
@@ -6607,7 +6658,7 @@
             </p:txBody>
           </p:sp>
         </mc:Choice>
-        <mc:Fallback>
+        <mc:Fallback xmlns="">
           <p:sp>
             <p:nvSpPr>
               <p:cNvPr id="5" name="TextBox 4">
@@ -6970,8 +7021,8 @@
           </a:p>
         </p:txBody>
       </p:sp>
-      <mc:AlternateContent xmlns:mc="http://schemas.openxmlformats.org/markup-compatibility/2006">
-        <mc:Choice xmlns:a14="http://schemas.microsoft.com/office/drawing/2010/main" Requires="a14">
+      <mc:AlternateContent xmlns:mc="http://schemas.openxmlformats.org/markup-compatibility/2006" xmlns:a14="http://schemas.microsoft.com/office/drawing/2010/main">
+        <mc:Choice Requires="a14">
           <p:sp>
             <p:nvSpPr>
               <p:cNvPr id="12" name="TextBox 11">
@@ -7226,7 +7277,7 @@
             </p:txBody>
           </p:sp>
         </mc:Choice>
-        <mc:Fallback>
+        <mc:Fallback xmlns="">
           <p:sp>
             <p:nvSpPr>
               <p:cNvPr id="12" name="TextBox 11">
@@ -7662,7 +7713,7 @@
                       <m:sSub>
                         <m:sSubPr>
                           <m:ctrlPr>
-                            <a:rPr lang="en-CA" i="1">
+                            <a:rPr lang="en-CA" b="0" i="1">
                               <a:solidFill>
                                 <a:prstClr val="black"/>
                               </a:solidFill>
@@ -7672,7 +7723,7 @@
                         </m:sSubPr>
                         <m:e>
                           <m:r>
-                            <a:rPr lang="en-CA" i="1">
+                            <a:rPr lang="en-CA" b="0" i="1">
                               <a:solidFill>
                                 <a:prstClr val="black"/>
                               </a:solidFill>
@@ -7683,7 +7734,7 @@
                         </m:e>
                         <m:sub>
                           <m:r>
-                            <a:rPr lang="en-CA" i="1">
+                            <a:rPr lang="en-CA" b="0" i="1">
                               <a:solidFill>
                                 <a:prstClr val="black"/>
                               </a:solidFill>
@@ -7748,7 +7799,7 @@
                       <m:sSub>
                         <m:sSubPr>
                           <m:ctrlPr>
-                            <a:rPr lang="en-CA" i="1">
+                            <a:rPr lang="en-CA" b="0" i="1">
                               <a:solidFill>
                                 <a:prstClr val="black"/>
                               </a:solidFill>
@@ -7758,7 +7809,7 @@
                         </m:sSubPr>
                         <m:e>
                           <m:r>
-                            <a:rPr lang="en-CA" i="1">
+                            <a:rPr lang="en-CA" b="0" i="1">
                               <a:solidFill>
                                 <a:prstClr val="black"/>
                               </a:solidFill>
@@ -7769,7 +7820,7 @@
                         </m:e>
                         <m:sub>
                           <m:r>
-                            <a:rPr lang="en-CA" i="1">
+                            <a:rPr lang="en-CA" b="0" i="1">
                               <a:solidFill>
                                 <a:prstClr val="black"/>
                               </a:solidFill>
@@ -7778,7 +7829,7 @@
                             <m:t>𝑛</m:t>
                           </m:r>
                           <m:r>
-                            <a:rPr lang="en-CA" i="1">
+                            <a:rPr lang="en-CA" b="0" i="1">
                               <a:solidFill>
                                 <a:prstClr val="black"/>
                               </a:solidFill>
@@ -7803,14 +7854,77 @@
                 <a:endParaRPr lang="en-US" dirty="0"/>
               </a:p>
               <a:p>
-                <a:pPr/>
                 <a:endParaRPr lang="en-US" dirty="0"/>
               </a:p>
               <a:p>
-                <a:pPr/>
+                <a14:m>
+                  <m:oMath xmlns:m="http://schemas.openxmlformats.org/officeDocument/2006/math">
+                    <m:sSub>
+                      <m:sSubPr>
+                        <m:ctrlPr>
+                          <a:rPr lang="en-CA" b="0" i="1">
+                            <a:solidFill>
+                              <a:prstClr val="black"/>
+                            </a:solidFill>
+                            <a:latin typeface="Cambria Math" panose="02040503050406030204" pitchFamily="18" charset="0"/>
+                          </a:rPr>
+                        </m:ctrlPr>
+                      </m:sSubPr>
+                      <m:e>
+                        <m:r>
+                          <a:rPr lang="en-CA" b="0" i="1">
+                            <a:solidFill>
+                              <a:prstClr val="black"/>
+                            </a:solidFill>
+                            <a:latin typeface="Cambria Math" panose="02040503050406030204" pitchFamily="18" charset="0"/>
+                          </a:rPr>
+                          <m:t>𝐹</m:t>
+                        </m:r>
+                      </m:e>
+                      <m:sub>
+                        <m:r>
+                          <a:rPr lang="en-CA" b="0" i="1">
+                            <a:solidFill>
+                              <a:prstClr val="black"/>
+                            </a:solidFill>
+                            <a:latin typeface="Cambria Math" panose="02040503050406030204" pitchFamily="18" charset="0"/>
+                          </a:rPr>
+                          <m:t>𝑛</m:t>
+                        </m:r>
+                        <m:r>
+                          <a:rPr lang="en-CA" b="0" i="1">
+                            <a:solidFill>
+                              <a:prstClr val="black"/>
+                            </a:solidFill>
+                            <a:latin typeface="Cambria Math" panose="02040503050406030204" pitchFamily="18" charset="0"/>
+                          </a:rPr>
+                          <m:t>−2</m:t>
+                        </m:r>
+                        <m:r>
+                          <a:rPr lang="en-CA" b="0" i="1">
+                            <a:solidFill>
+                              <a:prstClr val="black"/>
+                            </a:solidFill>
+                            <a:latin typeface="Cambria Math" panose="02040503050406030204" pitchFamily="18" charset="0"/>
+                          </a:rPr>
+                          <m:t>𝑘</m:t>
+                        </m:r>
+                      </m:sub>
+                    </m:sSub>
+                    <m:r>
+                      <a:rPr lang="en-CA" b="0" i="1">
+                        <a:solidFill>
+                          <a:prstClr val="black"/>
+                        </a:solidFill>
+                        <a:latin typeface="Cambria Math" panose="02040503050406030204" pitchFamily="18" charset="0"/>
+                      </a:rPr>
+                      <m:t> </m:t>
+                    </m:r>
+                  </m:oMath>
+                </a14:m>
                 <a:r>
                   <a:rPr lang="en-US" dirty="0"/>
-                  <a:t>This takes </a:t>
+                  <a:t>hits the base case when </a:t>
                 </a:r>
                 <a14:m>
                   <m:oMath xmlns:m="http://schemas.openxmlformats.org/officeDocument/2006/math">
@@ -7859,7 +7973,21 @@
                 </a14:m>
                 <a:r>
                   <a:rPr lang="en-US" dirty="0"/>
-                  <a:t> applications, and plugging that in gives </a:t>
+                  <a:t>, and plugging that </a:t>
+                </a:r>
+                <a14:m>
+                  <m:oMath xmlns:m="http://schemas.openxmlformats.org/officeDocument/2006/math">
+                    <m:r>
+                      <a:rPr lang="en-US" i="1" dirty="0" smtClean="0">
+                        <a:latin typeface="Cambria Math" panose="02040503050406030204" pitchFamily="18" charset="0"/>
+                      </a:rPr>
+                      <m:t>𝑘</m:t>
+                    </m:r>
+                  </m:oMath>
+                </a14:m>
+                <a:r>
+                  <a:rPr lang="en-US" dirty="0"/>
+                  <a:t> in gives </a:t>
                 </a:r>
                 <a14:m>
                   <m:oMath xmlns:m="http://schemas.openxmlformats.org/officeDocument/2006/math">
@@ -8041,9 +8169,8 @@
                 </a:r>
               </a:p>
               <a:p>
-                <a:pPr/>
                 <a:r>
-                  <a:rPr lang="en-US" dirty="0"/>
+                  <a:rPr lang="en-US" b="1" dirty="0"/>
                   <a:t>So </a:t>
                 </a:r>
                 <a14:m>
@@ -8051,7 +8178,7 @@
                     <m:sSub>
                       <m:sSubPr>
                         <m:ctrlPr>
-                          <a:rPr lang="en-CA" i="1">
+                          <a:rPr lang="en-CA" b="1" i="1">
                             <a:solidFill>
                               <a:prstClr val="black"/>
                             </a:solidFill>
@@ -8061,31 +8188,31 @@
                       </m:sSubPr>
                       <m:e>
                         <m:r>
-                          <a:rPr lang="en-CA" i="1">
+                          <a:rPr lang="en-CA" b="1" i="1">
                             <a:solidFill>
                               <a:prstClr val="black"/>
                             </a:solidFill>
                             <a:latin typeface="Cambria Math" panose="02040503050406030204" pitchFamily="18" charset="0"/>
                           </a:rPr>
-                          <m:t>𝐹</m:t>
+                          <m:t>𝑭</m:t>
                         </m:r>
                       </m:e>
                       <m:sub>
                         <m:r>
-                          <a:rPr lang="en-CA" i="1">
+                          <a:rPr lang="en-CA" b="1" i="1">
                             <a:solidFill>
                               <a:prstClr val="black"/>
                             </a:solidFill>
                             <a:latin typeface="Cambria Math" panose="02040503050406030204" pitchFamily="18" charset="0"/>
                           </a:rPr>
-                          <m:t>𝑛</m:t>
+                          <m:t>𝒏</m:t>
                         </m:r>
                       </m:sub>
                     </m:sSub>
                   </m:oMath>
                 </a14:m>
                 <a:r>
-                  <a:rPr lang="en-US" dirty="0"/>
+                  <a:rPr lang="en-US" b="1" dirty="0"/>
                   <a:t> grows at least as fast as </a:t>
                 </a:r>
                 <a14:m>
@@ -8093,7 +8220,7 @@
                     <m:sSup>
                       <m:sSupPr>
                         <m:ctrlPr>
-                          <a:rPr lang="en-US" i="1">
+                          <a:rPr lang="en-US" b="1" i="1">
                             <a:solidFill>
                               <a:prstClr val="black"/>
                             </a:solidFill>
@@ -8106,7 +8233,7 @@
                           <m:radPr>
                             <m:degHide m:val="on"/>
                             <m:ctrlPr>
-                              <a:rPr lang="en-US" i="1">
+                              <a:rPr lang="en-US" b="1" i="1">
                                 <a:solidFill>
                                   <a:prstClr val="black"/>
                                 </a:solidFill>
@@ -8117,33 +8244,33 @@
                           <m:deg/>
                           <m:e>
                             <m:r>
-                              <a:rPr lang="en-CA" i="1">
+                              <a:rPr lang="en-CA" b="1" i="1">
                                 <a:solidFill>
                                   <a:prstClr val="black"/>
                                 </a:solidFill>
                                 <a:latin typeface="Cambria Math" panose="02040503050406030204" pitchFamily="18" charset="0"/>
                               </a:rPr>
-                              <m:t>2</m:t>
+                              <m:t>𝟐</m:t>
                             </m:r>
                           </m:e>
                         </m:rad>
                       </m:e>
                       <m:sup>
                         <m:r>
-                          <a:rPr lang="en-CA" i="1">
+                          <a:rPr lang="en-CA" b="1" i="1">
                             <a:solidFill>
                               <a:prstClr val="black"/>
                             </a:solidFill>
                             <a:latin typeface="Cambria Math" panose="02040503050406030204" pitchFamily="18" charset="0"/>
                           </a:rPr>
-                          <m:t>𝑛</m:t>
+                          <m:t>𝒏</m:t>
                         </m:r>
                       </m:sup>
                     </m:sSup>
                   </m:oMath>
                 </a14:m>
                 <a:r>
-                  <a:rPr lang="en-US" dirty="0"/>
+                  <a:rPr lang="en-US" b="1" dirty="0"/>
                   <a:t>.</a:t>
                 </a:r>
               </a:p>
@@ -8176,7 +8303,7 @@
               <a:blipFill>
                 <a:blip r:embed="rId3"/>
                 <a:stretch>
-                  <a:fillRect l="-882" t="-345" b="-1724"/>
+                  <a:fillRect l="-882" t="-345" r="-588" b="-1379"/>
                 </a:stretch>
               </a:blipFill>
               <a:ln>
@@ -8543,8 +8670,8 @@
           </a:p>
         </p:txBody>
       </p:sp>
-      <mc:AlternateContent xmlns:mc="http://schemas.openxmlformats.org/markup-compatibility/2006">
-        <mc:Choice xmlns:a14="http://schemas.microsoft.com/office/drawing/2010/main" Requires="a14">
+      <mc:AlternateContent xmlns:mc="http://schemas.openxmlformats.org/markup-compatibility/2006" xmlns:a14="http://schemas.microsoft.com/office/drawing/2010/main">
+        <mc:Choice Requires="a14">
           <p:sp>
             <p:nvSpPr>
               <p:cNvPr id="12" name="TextBox 11">
@@ -8799,7 +8926,7 @@
             </p:txBody>
           </p:sp>
         </mc:Choice>
-        <mc:Fallback>
+        <mc:Fallback xmlns="">
           <p:sp>
             <p:nvSpPr>
               <p:cNvPr id="12" name="TextBox 11">
@@ -9064,8 +9191,12 @@
               </a:p>
               <a:p>
                 <a:r>
+                  <a:rPr lang="en-US"/>
+                  <a:t>Combining them</a:t>
+                </a:r>
+                <a:r>
                   <a:rPr lang="en-US" dirty="0"/>
-                  <a:t>So combining them:</a:t>
+                  <a:t>:</a:t>
                 </a:r>
               </a:p>
               <a:p>
@@ -9197,11 +9328,9 @@
                 <a:endParaRPr lang="en-US" dirty="0"/>
               </a:p>
               <a:p>
-                <a:pPr/>
                 <a:endParaRPr lang="en-US" dirty="0"/>
               </a:p>
               <a:p>
-                <a:pPr/>
                 <a:r>
                   <a:rPr lang="en-US" dirty="0"/>
                   <a:t>Since </a:t>
@@ -9261,7 +9390,7 @@
                       <m:sSub>
                         <m:sSubPr>
                           <m:ctrlPr>
-                            <a:rPr lang="en-US" i="1">
+                            <a:rPr lang="en-CA" b="0" i="1" smtClean="0">
                               <a:solidFill>
                                 <a:prstClr val="black"/>
                               </a:solidFill>
@@ -9363,11 +9492,9 @@
                 <a:endParaRPr lang="en-US" dirty="0"/>
               </a:p>
               <a:p>
-                <a:pPr/>
                 <a:endParaRPr lang="en-US" dirty="0"/>
               </a:p>
               <a:p>
-                <a:pPr/>
                 <a:r>
                   <a:rPr lang="en-US" dirty="0"/>
                   <a:t>The exact value </a:t>
@@ -9784,8 +9911,8 @@
           </a:p>
         </p:txBody>
       </p:sp>
-      <mc:AlternateContent xmlns:mc="http://schemas.openxmlformats.org/markup-compatibility/2006">
-        <mc:Choice xmlns:a14="http://schemas.microsoft.com/office/drawing/2010/main" Requires="a14">
+      <mc:AlternateContent xmlns:mc="http://schemas.openxmlformats.org/markup-compatibility/2006" xmlns:a14="http://schemas.microsoft.com/office/drawing/2010/main">
+        <mc:Choice Requires="a14">
           <p:sp>
             <p:nvSpPr>
               <p:cNvPr id="12" name="TextBox 11">
@@ -10040,7 +10167,7 @@
             </p:txBody>
           </p:sp>
         </mc:Choice>
-        <mc:Fallback>
+        <mc:Fallback xmlns="">
           <p:sp>
             <p:nvSpPr>
               <p:cNvPr id="12" name="TextBox 11">
@@ -10145,8 +10272,8 @@
           </a:prstGeom>
         </p:spPr>
       </p:pic>
-      <mc:AlternateContent xmlns:mc="http://schemas.openxmlformats.org/markup-compatibility/2006">
-        <mc:Choice xmlns:a14="http://schemas.microsoft.com/office/drawing/2010/main" Requires="a14">
+      <mc:AlternateContent xmlns:mc="http://schemas.openxmlformats.org/markup-compatibility/2006" xmlns:a14="http://schemas.microsoft.com/office/drawing/2010/main">
+        <mc:Choice Requires="a14">
           <p:sp>
             <p:nvSpPr>
               <p:cNvPr id="15" name="TextBox 14">
@@ -10204,7 +10331,7 @@
             </p:txBody>
           </p:sp>
         </mc:Choice>
-        <mc:Fallback>
+        <mc:Fallback xmlns="">
           <p:sp>
             <p:nvSpPr>
               <p:cNvPr id="15" name="TextBox 14">
